--- a/docs/eclandpy_liaise_slides.pptx
+++ b/docs/eclandpy_liaise_slides.pptx
@@ -3829,7 +3829,7 @@
         </p:nvGraphicFramePr>
         <p:xfrm>
           <a:off x="548640" y="1463040"/>
-          <a:ext cx="11064240" cy="1536192"/>
+          <a:ext cx="11064240" cy="1737360"/>
         </p:xfrm>
         <a:graphic>
           <a:graphicData uri="http://schemas.openxmlformats.org/drawingml/2006/table">
@@ -3843,14 +3843,14 @@
                 <a:gridCol w="2766060"/>
                 <a:gridCol w="2766060"/>
               </a:tblGrid>
-              <a:tr h="384048">
+              <a:tr h="347472">
                 <a:tc>
                   <a:txBody>
                     <a:bodyPr/>
                     <a:lstStyle/>
                     <a:p>
                       <a:pPr>
-                        <a:defRPr sz="1400" b="1"/>
+                        <a:defRPr sz="1300" b="1"/>
                       </a:pPr>
                       <a:r>
                         <a:t>configuration</a:t>
@@ -3865,7 +3865,22 @@
                     <a:lstStyle/>
                     <a:p>
                       <a:pPr>
-                        <a:defRPr sz="1400" b="1"/>
+                        <a:defRPr sz="1300" b="1"/>
+                      </a:pPr>
+                      <a:r>
+                        <a:t>per step</a:t>
+                      </a:r>
+                    </a:p>
+                  </a:txBody>
+                  <a:tcPr/>
+                </a:tc>
+                <a:tc>
+                  <a:txBody>
+                    <a:bodyPr/>
+                    <a:lstStyle/>
+                    <a:p>
+                      <a:pPr>
+                        <a:defRPr sz="1300" b="1"/>
                       </a:pPr>
                       <a:r>
                         <a:t>per year</a:t>
@@ -3880,10 +3895,27 @@
                     <a:lstStyle/>
                     <a:p>
                       <a:pPr>
-                        <a:defRPr sz="1400" b="1"/>
+                        <a:defRPr sz="1300" b="1"/>
                       </a:pPr>
                       <a:r>
-                        <a:t>per step</a:t>
+                        <a:t>37 years</a:t>
+                      </a:r>
+                    </a:p>
+                  </a:txBody>
+                  <a:tcPr/>
+                </a:tc>
+              </a:tr>
+              <a:tr h="347472">
+                <a:tc>
+                  <a:txBody>
+                    <a:bodyPr/>
+                    <a:lstStyle/>
+                    <a:p>
+                      <a:pPr>
+                        <a:defRPr sz="1300" b="0"/>
+                      </a:pPr>
+                      <a:r>
+                        <a:t>Fortran ecLand CY50R1, 4 OpenMP threads</a:t>
                       </a:r>
                     </a:p>
                   </a:txBody>
@@ -3895,27 +3927,10 @@
                     <a:lstStyle/>
                     <a:p>
                       <a:pPr>
-                        <a:defRPr sz="1400" b="1"/>
+                        <a:defRPr sz="1300" b="0"/>
                       </a:pPr>
                       <a:r>
-                        <a:t>37 years</a:t>
-                      </a:r>
-                    </a:p>
-                  </a:txBody>
-                  <a:tcPr/>
-                </a:tc>
-              </a:tr>
-              <a:tr h="384048">
-                <a:tc>
-                  <a:txBody>
-                    <a:bodyPr/>
-                    <a:lstStyle/>
-                    <a:p>
-                      <a:pPr>
-                        <a:defRPr sz="1400" b="0"/>
-                      </a:pPr>
-                      <a:r>
-                        <a:t>Fortran ecLand CY50R1, 1 node, 4 OpenMP threads</a:t>
+                        <a:t>8.8 ms</a:t>
                       </a:r>
                     </a:p>
                   </a:txBody>
@@ -3927,10 +3942,10 @@
                     <a:lstStyle/>
                     <a:p>
                       <a:pPr>
-                        <a:defRPr sz="1400" b="0"/>
+                        <a:defRPr sz="1300" b="0"/>
                       </a:pPr>
                       <a:r>
-                        <a:t>2.56 min</a:t>
+                        <a:t>2.6 min</a:t>
                       </a:r>
                     </a:p>
                   </a:txBody>
@@ -3942,10 +3957,27 @@
                     <a:lstStyle/>
                     <a:p>
                       <a:pPr>
-                        <a:defRPr sz="1400" b="0"/>
+                        <a:defRPr sz="1300" b="0"/>
                       </a:pPr>
                       <a:r>
-                        <a:t>~8.8 ms</a:t>
+                        <a:t>1 h 35 m (measured)</a:t>
+                      </a:r>
+                    </a:p>
+                  </a:txBody>
+                  <a:tcPr/>
+                </a:tc>
+              </a:tr>
+              <a:tr h="347472">
+                <a:tc>
+                  <a:txBody>
+                    <a:bodyPr/>
+                    <a:lstStyle/>
+                    <a:p>
+                      <a:pPr>
+                        <a:defRPr sz="1300" b="0"/>
+                      </a:pPr>
+                      <a:r>
+                        <a:t>eclandpy gt:cpu_kfirst, 1 core — current code</a:t>
                       </a:r>
                     </a:p>
                   </a:txBody>
@@ -3957,27 +3989,10 @@
                     <a:lstStyle/>
                     <a:p>
                       <a:pPr>
-                        <a:defRPr sz="1400" b="0"/>
+                        <a:defRPr sz="1300" b="0"/>
                       </a:pPr>
                       <a:r>
-                        <a:t>1 h 35 m (measured)</a:t>
-                      </a:r>
-                    </a:p>
-                  </a:txBody>
-                  <a:tcPr/>
-                </a:tc>
-              </a:tr>
-              <a:tr h="384048">
-                <a:tc>
-                  <a:txBody>
-                    <a:bodyPr/>
-                    <a:lstStyle/>
-                    <a:p>
-                      <a:pPr>
-                        <a:defRPr sz="1400" b="0"/>
-                      </a:pPr>
-                      <a:r>
-                        <a:t>eclandpy, gt:cpu_kfirst, 1 CPU core</a:t>
+                        <a:t>24 ms</a:t>
                       </a:r>
                     </a:p>
                   </a:txBody>
@@ -3989,7 +4004,69 @@
                     <a:lstStyle/>
                     <a:p>
                       <a:pPr>
-                        <a:defRPr sz="1400" b="0"/>
+                        <a:defRPr sz="1300" b="0"/>
+                      </a:pPr>
+                      <a:r>
+                        <a:t>≈7 min</a:t>
+                      </a:r>
+                    </a:p>
+                  </a:txBody>
+                  <a:tcPr/>
+                </a:tc>
+                <a:tc>
+                  <a:txBody>
+                    <a:bodyPr/>
+                    <a:lstStyle/>
+                    <a:p>
+                      <a:pPr>
+                        <a:defRPr sz="1300" b="0"/>
+                      </a:pPr>
+                      <a:r>
+                        <a:t>≈4.3 h (projected)</a:t>
+                      </a:r>
+                    </a:p>
+                  </a:txBody>
+                  <a:tcPr/>
+                </a:tc>
+              </a:tr>
+              <a:tr h="347472">
+                <a:tc>
+                  <a:txBody>
+                    <a:bodyPr/>
+                    <a:lstStyle/>
+                    <a:p>
+                      <a:pPr>
+                        <a:defRPr sz="1300" b="0"/>
+                      </a:pPr>
+                      <a:r>
+                        <a:t>eclandpy gt:cpu_kfirst, 1 core — as run (pre-merge code)</a:t>
+                      </a:r>
+                    </a:p>
+                  </a:txBody>
+                  <a:tcPr/>
+                </a:tc>
+                <a:tc>
+                  <a:txBody>
+                    <a:bodyPr/>
+                    <a:lstStyle/>
+                    <a:p>
+                      <a:pPr>
+                        <a:defRPr sz="1300" b="0"/>
+                      </a:pPr>
+                      <a:r>
+                        <a:t>104 ms</a:t>
+                      </a:r>
+                    </a:p>
+                  </a:txBody>
+                  <a:tcPr/>
+                </a:tc>
+                <a:tc>
+                  <a:txBody>
+                    <a:bodyPr/>
+                    <a:lstStyle/>
+                    <a:p>
+                      <a:pPr>
+                        <a:defRPr sz="1300" b="0"/>
                       </a:pPr>
                       <a:r>
                         <a:t>30.5 min</a:t>
@@ -4004,10 +4081,27 @@
                     <a:lstStyle/>
                     <a:p>
                       <a:pPr>
-                        <a:defRPr sz="1400" b="0"/>
+                        <a:defRPr sz="1300" b="0"/>
                       </a:pPr>
                       <a:r>
-                        <a:t>~109 ms</a:t>
+                        <a:t>13.7 h for 27 yr (measured)</a:t>
+                      </a:r>
+                    </a:p>
+                  </a:txBody>
+                  <a:tcPr/>
+                </a:tc>
+              </a:tr>
+              <a:tr h="347472">
+                <a:tc>
+                  <a:txBody>
+                    <a:bodyPr/>
+                    <a:lstStyle/>
+                    <a:p>
+                      <a:pPr>
+                        <a:defRPr sz="1300" b="0"/>
+                      </a:pPr>
+                      <a:r>
+                        <a:t>eclandpy gt:gpu, 1× A100 (physics / with recorders)</a:t>
                       </a:r>
                     </a:p>
                   </a:txBody>
@@ -4019,27 +4113,10 @@
                     <a:lstStyle/>
                     <a:p>
                       <a:pPr>
-                        <a:defRPr sz="1400" b="0"/>
+                        <a:defRPr sz="1300" b="0"/>
                       </a:pPr>
                       <a:r>
-                        <a:t>~19 h</a:t>
-                      </a:r>
-                    </a:p>
-                  </a:txBody>
-                  <a:tcPr/>
-                </a:tc>
-              </a:tr>
-              <a:tr h="384048">
-                <a:tc>
-                  <a:txBody>
-                    <a:bodyPr/>
-                    <a:lstStyle/>
-                    <a:p>
-                      <a:pPr>
-                        <a:defRPr sz="1400" b="0"/>
-                      </a:pPr>
-                      <a:r>
-                        <a:t>eclandpy, gt:gpu, 1× NVIDIA A100</a:t>
+                        <a:t>32 / 37 ms</a:t>
                       </a:r>
                     </a:p>
                   </a:txBody>
@@ -4051,10 +4128,10 @@
                     <a:lstStyle/>
                     <a:p>
                       <a:pPr>
-                        <a:defRPr sz="1400" b="0"/>
+                        <a:defRPr sz="1300" b="0"/>
                       </a:pPr>
                       <a:r>
-                        <a:t>10.6 min</a:t>
+                        <a:t>10.8 min</a:t>
                       </a:r>
                     </a:p>
                   </a:txBody>
@@ -4066,25 +4143,10 @@
                     <a:lstStyle/>
                     <a:p>
                       <a:pPr>
-                        <a:defRPr sz="1400" b="0"/>
+                        <a:defRPr sz="1300" b="0"/>
                       </a:pPr>
                       <a:r>
-                        <a:t>31 ms</a:t>
-                      </a:r>
-                    </a:p>
-                  </a:txBody>
-                  <a:tcPr/>
-                </a:tc>
-                <a:tc>
-                  <a:txBody>
-                    <a:bodyPr/>
-                    <a:lstStyle/>
-                    <a:p>
-                      <a:pPr>
-                        <a:defRPr sz="1400" b="0"/>
-                      </a:pPr>
-                      <a:r>
-                        <a:t>6.5 h (measured, incl. resume)</a:t>
+                        <a:t>6.7 h (measured)</a:t>
                       </a:r>
                     </a:p>
                   </a:txBody>
@@ -4111,8 +4173,8 @@
         </p:blipFill>
         <p:spPr>
           <a:xfrm>
-            <a:off x="3355848" y="3291840"/>
-            <a:ext cx="5486400" cy="2508069"/>
+            <a:off x="3566160" y="3429000"/>
+            <a:ext cx="5029200" cy="2424793"/>
           </a:xfrm>
           <a:prstGeom prst="rect">
             <a:avLst/>
@@ -4127,8 +4189,8 @@
         </p:nvSpPr>
         <p:spPr>
           <a:xfrm>
-            <a:off x="548640" y="5897880"/>
-            <a:ext cx="11064240" cy="822960"/>
+            <a:off x="548640" y="5806440"/>
+            <a:ext cx="11064240" cy="1005840"/>
           </a:xfrm>
           <a:prstGeom prst="rect">
             <a:avLst/>
@@ -4145,7 +4207,22 @@
               <a:spcAft>
                 <a:spcPts val="900"/>
               </a:spcAft>
-              <a:defRPr sz="1400">
+              <a:defRPr sz="1200">
+                <a:solidFill>
+                  <a:srgbClr val="1C1B19"/>
+                </a:solidFill>
+              </a:defRPr>
+            </a:pPr>
+            <a:r>
+              <a:t>•  The archived CPU run predates C. Kühnlein's main merge (4× faster CPU path); the earlier "2.9× GPU speed-up" compared across code versions and was wrong</a:t>
+            </a:r>
+          </a:p>
+          <a:p>
+            <a:pPr>
+              <a:spcAft>
+                <a:spcPts val="900"/>
+              </a:spcAft>
+              <a:defRPr sz="1200">
                 <a:solidFill>
                   <a:srgbClr val="1C1B19"/>
                 </a:solidFill>
@@ -4818,7 +4895,7 @@
               </a:defRPr>
             </a:pPr>
             <a:r>
-              <a:t>•  GPU 2.9× faster than one CPU core, ~4× slower than Fortran on 4 cores — the domain is too small to fill an A100</a:t>
+              <a:t>•  Per step: Fortran 8.8 ms (4 threads), eclandpy 24 ms on one CPU core, 32 ms on an A100 — 368 columns cannot fill a GPU; the case for the port is at scale</a:t>
             </a:r>
           </a:p>
         </p:txBody>
@@ -5490,6 +5567,36 @@
             </a:pPr>
             <a:r>
               <a:t>•  Sign conventions cost real effort: Qsb is a negative soil-column loss, so total runoff is −(Qs+Qsb); Qs−Qsb double-counts surface runoff and passed every plausibility check until compared with Fortran discharge.</a:t>
+            </a:r>
+          </a:p>
+          <a:p>
+            <a:pPr>
+              <a:spcAft>
+                <a:spcPts val="900"/>
+              </a:spcAft>
+              <a:defRPr sz="1500">
+                <a:solidFill>
+                  <a:srgbClr val="1C1B19"/>
+                </a:solidFill>
+              </a:defRPr>
+            </a:pPr>
+            <a:r>
+              <a:t>•  Benchmark on one code version: the CPU and GPU runs straddled the ecland-porting main merge, which made the CPU path 4× faster, and the first performance comparison credited that to the GPU. Re-timed on the current code: 24 ms/step on one core, 32 ms on an A100, 8.8 ms for Fortran on four threads.</a:t>
+            </a:r>
+          </a:p>
+          <a:p>
+            <a:pPr>
+              <a:spcAft>
+                <a:spcPts val="900"/>
+              </a:spcAft>
+              <a:defRPr sz="1500">
+                <a:solidFill>
+                  <a:srgbClr val="1C1B19"/>
+                </a:solidFill>
+              </a:defRPr>
+            </a:pPr>
+            <a:r>
+              <a:t>•  Output files inherit HDF5's one-record-per-chunk default; time-chunking the writers (as ecLand's own offline driver now does) makes point-site files 5× smaller and time-series reads 45× faster at no change in values.</a:t>
             </a:r>
           </a:p>
         </p:txBody>
